--- a/P1008_DoctorJoy/DoctorJoy.pptx
+++ b/P1008_DoctorJoy/DoctorJoy.pptx
@@ -83,62 +83,7 @@
                 <a:uFillTx/>
                 <a:latin typeface="Arial"/>
               </a:rPr>
-              <a:t>Pulse </a:t>
-            </a:r>
-            <a:r>
-              <a:rPr lang="es-ES" sz="1400" b="0" u="none" strike="noStrike">
-                <a:solidFill>
-                  <a:srgbClr val="000000"/>
-                </a:solidFill>
-                <a:effectLst/>
-                <a:uFillTx/>
-                <a:latin typeface="Arial"/>
-              </a:rPr>
-              <a:t>para </a:t>
-            </a:r>
-            <a:r>
-              <a:rPr lang="es-ES" sz="1400" b="0" u="none" strike="noStrike">
-                <a:solidFill>
-                  <a:srgbClr val="000000"/>
-                </a:solidFill>
-                <a:effectLst/>
-                <a:uFillTx/>
-                <a:latin typeface="Arial"/>
-              </a:rPr>
-              <a:t>desplaz</a:t>
-            </a:r>
-            <a:r>
-              <a:rPr lang="es-ES" sz="1400" b="0" u="none" strike="noStrike">
-                <a:solidFill>
-                  <a:srgbClr val="000000"/>
-                </a:solidFill>
-                <a:effectLst/>
-                <a:uFillTx/>
-                <a:latin typeface="Arial"/>
-              </a:rPr>
-              <a:t>ar la </a:t>
-            </a:r>
-            <a:r>
-              <a:rPr lang="es-ES" sz="1400" b="0" u="none" strike="noStrike">
-                <a:solidFill>
-                  <a:srgbClr val="000000"/>
-                </a:solidFill>
-                <a:effectLst/>
-                <a:uFillTx/>
-                <a:latin typeface="Arial"/>
-              </a:rPr>
-              <a:t>diaposit</a:t>
-            </a:r>
-            <a:r>
-              <a:rPr lang="es-ES" sz="1400" b="0" u="none" strike="noStrike">
-                <a:solidFill>
-                  <a:srgbClr val="000000"/>
-                </a:solidFill>
-                <a:effectLst/>
-                <a:uFillTx/>
-                <a:latin typeface="Arial"/>
-              </a:rPr>
-              <a:t>iva</a:t>
+              <a:t>Pulse para desplazar la diapositiva</a:t>
             </a:r>
             <a:endParaRPr lang="es-ES" sz="1400" b="0" u="none" strike="noStrike">
               <a:solidFill>
@@ -191,40 +136,7 @@
                 <a:uFillTx/>
                 <a:latin typeface="Arial"/>
               </a:rPr>
-              <a:t>Pulse para </a:t>
-            </a:r>
-            <a:r>
-              <a:rPr lang="es-ES" sz="2000" b="0" u="none" strike="noStrike">
-                <a:solidFill>
-                  <a:srgbClr val="000000"/>
-                </a:solidFill>
-                <a:effectLst/>
-                <a:uFillTx/>
-                <a:latin typeface="Arial"/>
-              </a:rPr>
-              <a:t>editar el </a:t>
-            </a:r>
-            <a:r>
-              <a:rPr lang="es-ES" sz="2000" b="0" u="none" strike="noStrike">
-                <a:solidFill>
-                  <a:srgbClr val="000000"/>
-                </a:solidFill>
-                <a:effectLst/>
-                <a:uFillTx/>
-                <a:latin typeface="Arial"/>
-              </a:rPr>
-              <a:t>formato de </a:t>
-            </a:r>
-            <a:r>
-              <a:rPr lang="es-ES" sz="2000" b="0" u="none" strike="noStrike">
-                <a:solidFill>
-                  <a:srgbClr val="000000"/>
-                </a:solidFill>
-                <a:effectLst/>
-                <a:uFillTx/>
-                <a:latin typeface="Arial"/>
-              </a:rPr>
-              <a:t>las notas</a:t>
+              <a:t>Pulse para editar el formato de las notas</a:t>
             </a:r>
             <a:endParaRPr lang="es-ES" sz="2000" b="0" u="none" strike="noStrike">
               <a:solidFill>
@@ -466,7 +378,7 @@
             <a:pPr indent="0" algn="r">
               <a:buNone/>
             </a:pPr>
-            <a:fld id="{C3ABF59D-1780-4EE1-AFA5-663821174FBE}" type="slidenum">
+            <a:fld id="{28E047C6-DDCE-4249-8DCE-F5939AC431C0}" type="slidenum">
               <a:rPr lang="es-ES" sz="1400" b="0" u="none" strike="noStrike">
                 <a:solidFill>
                   <a:srgbClr val="000000"/>
@@ -524,7 +436,7 @@
         <p:spPr>
           <a:xfrm>
             <a:off x="685800" y="1143000"/>
-            <a:ext cx="5485680" cy="3085560"/>
+            <a:ext cx="5485320" cy="3085200"/>
           </a:xfrm>
           <a:prstGeom prst="rect">
             <a:avLst/>
@@ -547,7 +459,7 @@
         <p:spPr>
           <a:xfrm>
             <a:off x="685800" y="4400640"/>
-            <a:ext cx="5485680" cy="3599640"/>
+            <a:ext cx="5485320" cy="3599280"/>
           </a:xfrm>
           <a:prstGeom prst="rect">
             <a:avLst/>
@@ -589,7 +501,7 @@
         <p:spPr>
           <a:xfrm>
             <a:off x="3884760" y="8685360"/>
-            <a:ext cx="2971080" cy="457920"/>
+            <a:ext cx="2970720" cy="457560"/>
           </a:xfrm>
           <a:prstGeom prst="rect">
             <a:avLst/>
@@ -632,7 +544,7 @@
                 <a:tab pos="0" algn="l"/>
               </a:tabLst>
             </a:pPr>
-            <a:fld id="{B305A5DC-1275-4B08-9E6B-77C5A49F57C8}" type="slidenum">
+            <a:fld id="{35857EAA-D39D-4EBB-8358-7782F99783A4}" type="slidenum">
               <a:rPr lang="en-US" sz="1400" b="0" u="none" strike="noStrike">
                 <a:solidFill>
                   <a:srgbClr val="000000"/>
@@ -689,7 +601,7 @@
         <p:spPr>
           <a:xfrm>
             <a:off x="685800" y="1143000"/>
-            <a:ext cx="5485680" cy="3085560"/>
+            <a:ext cx="5485320" cy="3085200"/>
           </a:xfrm>
           <a:prstGeom prst="rect">
             <a:avLst/>
@@ -712,7 +624,7 @@
         <p:spPr>
           <a:xfrm>
             <a:off x="685800" y="4400640"/>
-            <a:ext cx="5485680" cy="3600000"/>
+            <a:ext cx="5485320" cy="3599640"/>
           </a:xfrm>
           <a:prstGeom prst="rect">
             <a:avLst/>
@@ -754,7 +666,7 @@
         <p:spPr>
           <a:xfrm>
             <a:off x="3884760" y="8685360"/>
-            <a:ext cx="2971080" cy="457920"/>
+            <a:ext cx="2970720" cy="457560"/>
           </a:xfrm>
           <a:prstGeom prst="rect">
             <a:avLst/>
@@ -797,7 +709,7 @@
                 <a:tab pos="0" algn="l"/>
               </a:tabLst>
             </a:pPr>
-            <a:fld id="{CDE1680E-7C9F-4A96-8265-A22CA94245E5}" type="slidenum">
+            <a:fld id="{D8C47BA5-1A02-4694-BDF5-822BAC5D8B58}" type="slidenum">
               <a:rPr lang="en-US" sz="1400" b="0" u="none" strike="noStrike">
                 <a:solidFill>
                   <a:srgbClr val="000000"/>
@@ -854,7 +766,7 @@
         <p:spPr>
           <a:xfrm>
             <a:off x="685800" y="1143000"/>
-            <a:ext cx="5485680" cy="3085560"/>
+            <a:ext cx="5485320" cy="3085200"/>
           </a:xfrm>
           <a:prstGeom prst="rect">
             <a:avLst/>
@@ -877,7 +789,7 @@
         <p:spPr>
           <a:xfrm>
             <a:off x="685800" y="4400640"/>
-            <a:ext cx="5485680" cy="3600000"/>
+            <a:ext cx="5485320" cy="3599640"/>
           </a:xfrm>
           <a:prstGeom prst="rect">
             <a:avLst/>
@@ -919,7 +831,7 @@
         <p:spPr>
           <a:xfrm>
             <a:off x="3884760" y="8685360"/>
-            <a:ext cx="2971080" cy="457920"/>
+            <a:ext cx="2970720" cy="457560"/>
           </a:xfrm>
           <a:prstGeom prst="rect">
             <a:avLst/>
@@ -962,7 +874,7 @@
                 <a:tab pos="0" algn="l"/>
               </a:tabLst>
             </a:pPr>
-            <a:fld id="{BD683373-CEBA-4936-A460-EEA30BC82D9F}" type="slidenum">
+            <a:fld id="{3D7EBCC2-37F1-4BA2-A429-4840DE2CA774}" type="slidenum">
               <a:rPr lang="en-US" sz="1400" b="0" u="none" strike="noStrike">
                 <a:solidFill>
                   <a:srgbClr val="000000"/>
@@ -1019,7 +931,7 @@
         <p:spPr>
           <a:xfrm>
             <a:off x="685800" y="1143000"/>
-            <a:ext cx="5485680" cy="3085560"/>
+            <a:ext cx="5485320" cy="3085200"/>
           </a:xfrm>
           <a:prstGeom prst="rect">
             <a:avLst/>
@@ -1042,7 +954,7 @@
         <p:spPr>
           <a:xfrm>
             <a:off x="685800" y="4400640"/>
-            <a:ext cx="5485680" cy="3600000"/>
+            <a:ext cx="5485320" cy="3599640"/>
           </a:xfrm>
           <a:prstGeom prst="rect">
             <a:avLst/>
@@ -1084,7 +996,7 @@
         <p:spPr>
           <a:xfrm>
             <a:off x="3884760" y="8685360"/>
-            <a:ext cx="2971080" cy="457920"/>
+            <a:ext cx="2970720" cy="457560"/>
           </a:xfrm>
           <a:prstGeom prst="rect">
             <a:avLst/>
@@ -1127,7 +1039,7 @@
                 <a:tab pos="0" algn="l"/>
               </a:tabLst>
             </a:pPr>
-            <a:fld id="{9A6EFFDC-AB21-4E01-82C5-96E5813143B0}" type="slidenum">
+            <a:fld id="{5E98312C-F0BE-416E-B74B-69BE40EE2F6C}" type="slidenum">
               <a:rPr lang="en-US" sz="1400" b="0" u="none" strike="noStrike">
                 <a:solidFill>
                   <a:srgbClr val="000000"/>
@@ -1184,7 +1096,7 @@
         <p:spPr>
           <a:xfrm>
             <a:off x="685800" y="1143000"/>
-            <a:ext cx="5485680" cy="3085560"/>
+            <a:ext cx="5485320" cy="3085200"/>
           </a:xfrm>
           <a:prstGeom prst="rect">
             <a:avLst/>
@@ -1207,7 +1119,7 @@
         <p:spPr>
           <a:xfrm>
             <a:off x="685800" y="4400640"/>
-            <a:ext cx="5485680" cy="3599640"/>
+            <a:ext cx="5485320" cy="3599280"/>
           </a:xfrm>
           <a:prstGeom prst="rect">
             <a:avLst/>
@@ -1249,7 +1161,7 @@
         <p:spPr>
           <a:xfrm>
             <a:off x="3884760" y="8685360"/>
-            <a:ext cx="2971080" cy="457920"/>
+            <a:ext cx="2970720" cy="457560"/>
           </a:xfrm>
           <a:prstGeom prst="rect">
             <a:avLst/>
@@ -1292,7 +1204,7 @@
                 <a:tab pos="0" algn="l"/>
               </a:tabLst>
             </a:pPr>
-            <a:fld id="{2988F7CB-2B0A-4943-802D-EB18A7461B89}" type="slidenum">
+            <a:fld id="{0DC3F909-6D1C-416C-A574-3B255DE906F8}" type="slidenum">
               <a:rPr lang="en-US" sz="1400" b="0" u="none" strike="noStrike">
                 <a:solidFill>
                   <a:srgbClr val="000000"/>
@@ -1349,7 +1261,7 @@
         <p:spPr>
           <a:xfrm>
             <a:off x="685800" y="1143000"/>
-            <a:ext cx="5485680" cy="3085560"/>
+            <a:ext cx="5485320" cy="3085200"/>
           </a:xfrm>
           <a:prstGeom prst="rect">
             <a:avLst/>
@@ -1372,7 +1284,7 @@
         <p:spPr>
           <a:xfrm>
             <a:off x="685800" y="4400640"/>
-            <a:ext cx="5485680" cy="3599640"/>
+            <a:ext cx="5485320" cy="3599280"/>
           </a:xfrm>
           <a:prstGeom prst="rect">
             <a:avLst/>
@@ -1414,7 +1326,7 @@
         <p:spPr>
           <a:xfrm>
             <a:off x="3884760" y="8685360"/>
-            <a:ext cx="2971080" cy="457920"/>
+            <a:ext cx="2970720" cy="457560"/>
           </a:xfrm>
           <a:prstGeom prst="rect">
             <a:avLst/>
@@ -1457,7 +1369,7 @@
                 <a:tab pos="0" algn="l"/>
               </a:tabLst>
             </a:pPr>
-            <a:fld id="{9467406B-1C64-483D-AA2A-84A5B0E76EC3}" type="slidenum">
+            <a:fld id="{88F547F8-AC2D-4504-93C8-84DD7CF53837}" type="slidenum">
               <a:rPr lang="en-US" sz="1400" b="0" u="none" strike="noStrike">
                 <a:solidFill>
                   <a:srgbClr val="000000"/>
@@ -1514,7 +1426,7 @@
         <p:spPr>
           <a:xfrm>
             <a:off x="685800" y="1143000"/>
-            <a:ext cx="5485680" cy="3085560"/>
+            <a:ext cx="5485320" cy="3085200"/>
           </a:xfrm>
           <a:prstGeom prst="rect">
             <a:avLst/>
@@ -1537,7 +1449,7 @@
         <p:spPr>
           <a:xfrm>
             <a:off x="685800" y="4400640"/>
-            <a:ext cx="5485680" cy="3599640"/>
+            <a:ext cx="5485320" cy="3599280"/>
           </a:xfrm>
           <a:prstGeom prst="rect">
             <a:avLst/>
@@ -1579,7 +1491,7 @@
         <p:spPr>
           <a:xfrm>
             <a:off x="3884760" y="8685360"/>
-            <a:ext cx="2971080" cy="457920"/>
+            <a:ext cx="2970720" cy="457560"/>
           </a:xfrm>
           <a:prstGeom prst="rect">
             <a:avLst/>
@@ -1622,7 +1534,7 @@
                 <a:tab pos="0" algn="l"/>
               </a:tabLst>
             </a:pPr>
-            <a:fld id="{9697478B-1B3E-4E5F-96CF-7DE605BDD80D}" type="slidenum">
+            <a:fld id="{DA105B17-356F-4079-8EAD-61C445B8DD19}" type="slidenum">
               <a:rPr lang="en-US" sz="1400" b="0" u="none" strike="noStrike">
                 <a:solidFill>
                   <a:srgbClr val="000000"/>
@@ -1679,7 +1591,7 @@
         <p:spPr>
           <a:xfrm>
             <a:off x="685800" y="1143000"/>
-            <a:ext cx="5485680" cy="3085560"/>
+            <a:ext cx="5485320" cy="3085200"/>
           </a:xfrm>
           <a:prstGeom prst="rect">
             <a:avLst/>
@@ -1702,7 +1614,7 @@
         <p:spPr>
           <a:xfrm>
             <a:off x="685800" y="4400640"/>
-            <a:ext cx="5485680" cy="3599640"/>
+            <a:ext cx="5485320" cy="3599280"/>
           </a:xfrm>
           <a:prstGeom prst="rect">
             <a:avLst/>
@@ -1744,7 +1656,7 @@
         <p:spPr>
           <a:xfrm>
             <a:off x="3884760" y="8685360"/>
-            <a:ext cx="2971080" cy="457920"/>
+            <a:ext cx="2970720" cy="457560"/>
           </a:xfrm>
           <a:prstGeom prst="rect">
             <a:avLst/>
@@ -1787,7 +1699,7 @@
                 <a:tab pos="0" algn="l"/>
               </a:tabLst>
             </a:pPr>
-            <a:fld id="{FEE9F61C-92D5-4E77-A552-66FD282857F0}" type="slidenum">
+            <a:fld id="{FE276059-6085-41DB-9E75-05035C01FDB7}" type="slidenum">
               <a:rPr lang="en-US" sz="1400" b="0" u="none" strike="noStrike">
                 <a:solidFill>
                   <a:srgbClr val="000000"/>
@@ -1844,7 +1756,7 @@
         <p:spPr>
           <a:xfrm>
             <a:off x="685800" y="1143000"/>
-            <a:ext cx="5485680" cy="3085560"/>
+            <a:ext cx="5485320" cy="3085200"/>
           </a:xfrm>
           <a:prstGeom prst="rect">
             <a:avLst/>
@@ -1867,7 +1779,7 @@
         <p:spPr>
           <a:xfrm>
             <a:off x="685800" y="4400640"/>
-            <a:ext cx="5485680" cy="3600000"/>
+            <a:ext cx="5485320" cy="3599640"/>
           </a:xfrm>
           <a:prstGeom prst="rect">
             <a:avLst/>
@@ -1909,7 +1821,7 @@
         <p:spPr>
           <a:xfrm>
             <a:off x="3884760" y="8685360"/>
-            <a:ext cx="2971080" cy="457920"/>
+            <a:ext cx="2970720" cy="457560"/>
           </a:xfrm>
           <a:prstGeom prst="rect">
             <a:avLst/>
@@ -1952,7 +1864,7 @@
                 <a:tab pos="0" algn="l"/>
               </a:tabLst>
             </a:pPr>
-            <a:fld id="{CDE4A948-4CE7-47CD-B30B-642E6B239BEA}" type="slidenum">
+            <a:fld id="{CF88650B-B0D9-4AAF-BC7B-98107FC1F5BB}" type="slidenum">
               <a:rPr lang="en-US" sz="1400" b="0" u="none" strike="noStrike">
                 <a:solidFill>
                   <a:srgbClr val="000000"/>
@@ -2009,7 +1921,7 @@
         <p:spPr>
           <a:xfrm>
             <a:off x="685800" y="1143000"/>
-            <a:ext cx="5485680" cy="3085560"/>
+            <a:ext cx="5485320" cy="3085200"/>
           </a:xfrm>
           <a:prstGeom prst="rect">
             <a:avLst/>
@@ -2032,7 +1944,7 @@
         <p:spPr>
           <a:xfrm>
             <a:off x="685800" y="4400640"/>
-            <a:ext cx="5485680" cy="3600000"/>
+            <a:ext cx="5485320" cy="3599640"/>
           </a:xfrm>
           <a:prstGeom prst="rect">
             <a:avLst/>
@@ -2074,7 +1986,7 @@
         <p:spPr>
           <a:xfrm>
             <a:off x="3884760" y="8685360"/>
-            <a:ext cx="2971080" cy="457920"/>
+            <a:ext cx="2970720" cy="457560"/>
           </a:xfrm>
           <a:prstGeom prst="rect">
             <a:avLst/>
@@ -2117,7 +2029,7 @@
                 <a:tab pos="0" algn="l"/>
               </a:tabLst>
             </a:pPr>
-            <a:fld id="{F1ECB257-E8EE-44F1-A352-65DF3E824F79}" type="slidenum">
+            <a:fld id="{ABF87E92-E3D5-47A0-9B01-7C7FF0533BDA}" type="slidenum">
               <a:rPr lang="en-US" sz="1400" b="0" u="none" strike="noStrike">
                 <a:solidFill>
                   <a:srgbClr val="000000"/>
@@ -2174,7 +2086,7 @@
         <p:spPr>
           <a:xfrm>
             <a:off x="685800" y="1143000"/>
-            <a:ext cx="5485680" cy="3085560"/>
+            <a:ext cx="5485320" cy="3085200"/>
           </a:xfrm>
           <a:prstGeom prst="rect">
             <a:avLst/>
@@ -2197,7 +2109,7 @@
         <p:spPr>
           <a:xfrm>
             <a:off x="685800" y="4400640"/>
-            <a:ext cx="5485680" cy="3600000"/>
+            <a:ext cx="5485320" cy="3599640"/>
           </a:xfrm>
           <a:prstGeom prst="rect">
             <a:avLst/>
@@ -2239,7 +2151,7 @@
         <p:spPr>
           <a:xfrm>
             <a:off x="3884760" y="8685360"/>
-            <a:ext cx="2971080" cy="457920"/>
+            <a:ext cx="2970720" cy="457560"/>
           </a:xfrm>
           <a:prstGeom prst="rect">
             <a:avLst/>
@@ -2282,7 +2194,7 @@
                 <a:tab pos="0" algn="l"/>
               </a:tabLst>
             </a:pPr>
-            <a:fld id="{D65A77DB-8841-4BA0-85C5-1EFC0C9748FA}" type="slidenum">
+            <a:fld id="{EB0A7958-23BF-4EA6-BD61-D5060F9129F3}" type="slidenum">
               <a:rPr lang="en-US" sz="1400" b="0" u="none" strike="noStrike">
                 <a:solidFill>
                   <a:srgbClr val="000000"/>
@@ -2339,7 +2251,7 @@
         <p:spPr>
           <a:xfrm>
             <a:off x="685800" y="1143000"/>
-            <a:ext cx="5485680" cy="3085560"/>
+            <a:ext cx="5485320" cy="3085200"/>
           </a:xfrm>
           <a:prstGeom prst="rect">
             <a:avLst/>
@@ -2362,7 +2274,7 @@
         <p:spPr>
           <a:xfrm>
             <a:off x="685800" y="4400640"/>
-            <a:ext cx="5485680" cy="3600000"/>
+            <a:ext cx="5485320" cy="3599640"/>
           </a:xfrm>
           <a:prstGeom prst="rect">
             <a:avLst/>
@@ -2404,7 +2316,7 @@
         <p:spPr>
           <a:xfrm>
             <a:off x="3884760" y="8685360"/>
-            <a:ext cx="2971080" cy="457920"/>
+            <a:ext cx="2970720" cy="457560"/>
           </a:xfrm>
           <a:prstGeom prst="rect">
             <a:avLst/>
@@ -2447,7 +2359,7 @@
                 <a:tab pos="0" algn="l"/>
               </a:tabLst>
             </a:pPr>
-            <a:fld id="{4BEA934F-2CBF-4E46-8F7E-A8A3581DB658}" type="slidenum">
+            <a:fld id="{5CA1710D-3FC8-471C-9BF2-2C95E6505717}" type="slidenum">
               <a:rPr lang="en-US" sz="1400" b="0" u="none" strike="noStrike">
                 <a:solidFill>
                   <a:srgbClr val="000000"/>
@@ -2504,7 +2416,7 @@
         <p:spPr>
           <a:xfrm>
             <a:off x="685800" y="1143000"/>
-            <a:ext cx="5485680" cy="3085560"/>
+            <a:ext cx="5485320" cy="3085200"/>
           </a:xfrm>
           <a:prstGeom prst="rect">
             <a:avLst/>
@@ -2527,7 +2439,7 @@
         <p:spPr>
           <a:xfrm>
             <a:off x="685800" y="4400640"/>
-            <a:ext cx="5485680" cy="3600000"/>
+            <a:ext cx="5485320" cy="3599640"/>
           </a:xfrm>
           <a:prstGeom prst="rect">
             <a:avLst/>
@@ -2569,7 +2481,7 @@
         <p:spPr>
           <a:xfrm>
             <a:off x="3884760" y="8685360"/>
-            <a:ext cx="2971080" cy="457920"/>
+            <a:ext cx="2970720" cy="457560"/>
           </a:xfrm>
           <a:prstGeom prst="rect">
             <a:avLst/>
@@ -2612,7 +2524,7 @@
                 <a:tab pos="0" algn="l"/>
               </a:tabLst>
             </a:pPr>
-            <a:fld id="{16ED8CDA-DF33-41A4-92D3-D3CAC04F5648}" type="slidenum">
+            <a:fld id="{AE5435D2-C1B7-4DC2-BD68-50E28C0F3382}" type="slidenum">
               <a:rPr lang="en-US" sz="1400" b="0" u="none" strike="noStrike">
                 <a:solidFill>
                   <a:srgbClr val="000000"/>
@@ -2744,29 +2656,7 @@
                 <a:uFillTx/>
                 <a:latin typeface="Arial"/>
               </a:rPr>
-              <a:t>Pulse para editar </a:t>
-            </a:r>
-            <a:r>
-              <a:rPr lang="es-ES" sz="1400" b="0" u="none" strike="noStrike">
-                <a:solidFill>
-                  <a:srgbClr val="000000"/>
-                </a:solidFill>
-                <a:effectLst/>
-                <a:uFillTx/>
-                <a:latin typeface="Arial"/>
-              </a:rPr>
-              <a:t>el formato del texto </a:t>
-            </a:r>
-            <a:r>
-              <a:rPr lang="es-ES" sz="1400" b="0" u="none" strike="noStrike">
-                <a:solidFill>
-                  <a:srgbClr val="000000"/>
-                </a:solidFill>
-                <a:effectLst/>
-                <a:uFillTx/>
-                <a:latin typeface="Arial"/>
-              </a:rPr>
-              <a:t>de título</a:t>
+              <a:t>Pulse para editar el formato del texto de título</a:t>
             </a:r>
             <a:endParaRPr lang="es-ES" sz="1400" b="0" u="none" strike="noStrike">
               <a:solidFill>
@@ -3209,7 +3099,7 @@
         <p:spPr>
           <a:xfrm>
             <a:off x="9418320" y="-1371600"/>
-            <a:ext cx="4571280" cy="4571280"/>
+            <a:ext cx="4570920" cy="4570920"/>
           </a:xfrm>
           <a:prstGeom prst="ellipse">
             <a:avLst/>
@@ -3254,7 +3144,7 @@
         <p:spPr>
           <a:xfrm>
             <a:off x="-1828800" y="4572000"/>
-            <a:ext cx="4114080" cy="4114080"/>
+            <a:ext cx="4113720" cy="4113720"/>
           </a:xfrm>
           <a:prstGeom prst="ellipse">
             <a:avLst/>
@@ -3299,7 +3189,7 @@
         <p:spPr>
           <a:xfrm>
             <a:off x="731520" y="2377440"/>
-            <a:ext cx="10697760" cy="456480"/>
+            <a:ext cx="10697400" cy="456120"/>
           </a:xfrm>
           <a:prstGeom prst="rect">
             <a:avLst/>
@@ -3360,7 +3250,7 @@
         <p:spPr>
           <a:xfrm>
             <a:off x="731520" y="2743200"/>
-            <a:ext cx="10697760" cy="639360"/>
+            <a:ext cx="10697400" cy="639000"/>
           </a:xfrm>
           <a:prstGeom prst="rect">
             <a:avLst/>
@@ -3421,7 +3311,7 @@
         <p:spPr>
           <a:xfrm>
             <a:off x="731520" y="3383280"/>
-            <a:ext cx="10697760" cy="456480"/>
+            <a:ext cx="10697400" cy="456120"/>
           </a:xfrm>
           <a:prstGeom prst="rect">
             <a:avLst/>
@@ -3482,7 +3372,7 @@
         <p:spPr>
           <a:xfrm>
             <a:off x="731520" y="6217920"/>
-            <a:ext cx="10697760" cy="365040"/>
+            <a:ext cx="10697400" cy="364680"/>
           </a:xfrm>
           <a:prstGeom prst="rect">
             <a:avLst/>
@@ -3553,7 +3443,7 @@
         <p:spPr>
           <a:xfrm>
             <a:off x="180000" y="180000"/>
-            <a:ext cx="4319640" cy="1401480"/>
+            <a:ext cx="4319280" cy="1401120"/>
           </a:xfrm>
           <a:prstGeom prst="rect">
             <a:avLst/>
@@ -3614,7 +3504,7 @@
         <p:spPr>
           <a:xfrm>
             <a:off x="9692640" y="457200"/>
-            <a:ext cx="1919520" cy="612000"/>
+            <a:ext cx="1919160" cy="611640"/>
           </a:xfrm>
           <a:prstGeom prst="rect">
             <a:avLst/>
@@ -3634,7 +3524,7 @@
         <p:spPr>
           <a:xfrm>
             <a:off x="548640" y="411480"/>
-            <a:ext cx="10972080" cy="730800"/>
+            <a:ext cx="10971720" cy="730440"/>
           </a:xfrm>
           <a:prstGeom prst="rect">
             <a:avLst/>
@@ -3695,7 +3585,7 @@
         <p:spPr>
           <a:xfrm>
             <a:off x="548640" y="1463040"/>
-            <a:ext cx="5760000" cy="4388400"/>
+            <a:ext cx="5759640" cy="4388040"/>
           </a:xfrm>
           <a:prstGeom prst="rect">
             <a:avLst/>
@@ -3858,7 +3748,7 @@
         <p:spPr>
           <a:xfrm>
             <a:off x="6675120" y="1463040"/>
-            <a:ext cx="4937040" cy="4388400"/>
+            <a:ext cx="4936680" cy="4388040"/>
           </a:xfrm>
           <a:prstGeom prst="roundRect">
             <a:avLst>
@@ -3914,7 +3804,7 @@
         <p:spPr>
           <a:xfrm>
             <a:off x="7947720" y="2461320"/>
-            <a:ext cx="2391840" cy="2391840"/>
+            <a:ext cx="2391480" cy="2391480"/>
           </a:xfrm>
           <a:prstGeom prst="rect">
             <a:avLst/>
@@ -3971,7 +3861,7 @@
         <p:spPr>
           <a:xfrm>
             <a:off x="-1371600" y="-1371600"/>
-            <a:ext cx="3656880" cy="3656880"/>
+            <a:ext cx="3656520" cy="3656520"/>
           </a:xfrm>
           <a:prstGeom prst="ellipse">
             <a:avLst/>
@@ -4016,7 +3906,7 @@
         <p:spPr>
           <a:xfrm>
             <a:off x="731520" y="2377440"/>
-            <a:ext cx="2742480" cy="1096560"/>
+            <a:ext cx="2742120" cy="1096200"/>
           </a:xfrm>
           <a:prstGeom prst="rect">
             <a:avLst/>
@@ -4077,7 +3967,7 @@
         <p:spPr>
           <a:xfrm>
             <a:off x="731520" y="3474720"/>
-            <a:ext cx="10697760" cy="913680"/>
+            <a:ext cx="10697400" cy="913320"/>
           </a:xfrm>
           <a:prstGeom prst="rect">
             <a:avLst/>
@@ -4138,7 +4028,7 @@
         <p:spPr>
           <a:xfrm>
             <a:off x="731520" y="4434840"/>
-            <a:ext cx="10697760" cy="547920"/>
+            <a:ext cx="10697400" cy="547560"/>
           </a:xfrm>
           <a:prstGeom prst="rect">
             <a:avLst/>
@@ -4209,7 +4099,7 @@
         <p:spPr>
           <a:xfrm>
             <a:off x="8820360" y="180360"/>
-            <a:ext cx="4319640" cy="1401480"/>
+            <a:ext cx="4319280" cy="1401120"/>
           </a:xfrm>
           <a:prstGeom prst="rect">
             <a:avLst/>
@@ -4270,7 +4160,7 @@
         <p:spPr>
           <a:xfrm>
             <a:off x="9692640" y="457200"/>
-            <a:ext cx="1919520" cy="612000"/>
+            <a:ext cx="1919160" cy="611640"/>
           </a:xfrm>
           <a:prstGeom prst="rect">
             <a:avLst/>
@@ -4290,7 +4180,7 @@
         <p:spPr>
           <a:xfrm>
             <a:off x="548640" y="411480"/>
-            <a:ext cx="10972080" cy="730800"/>
+            <a:ext cx="10971720" cy="730440"/>
           </a:xfrm>
           <a:prstGeom prst="rect">
             <a:avLst/>
@@ -4351,7 +4241,7 @@
         <p:spPr>
           <a:xfrm>
             <a:off x="548640" y="1463040"/>
-            <a:ext cx="5760000" cy="4388400"/>
+            <a:ext cx="5759640" cy="4388040"/>
           </a:xfrm>
           <a:prstGeom prst="rect">
             <a:avLst/>
@@ -4514,7 +4404,7 @@
         <p:spPr>
           <a:xfrm>
             <a:off x="6675120" y="1463040"/>
-            <a:ext cx="4937040" cy="4388400"/>
+            <a:ext cx="4936680" cy="4388040"/>
           </a:xfrm>
           <a:prstGeom prst="roundRect">
             <a:avLst>
@@ -4570,7 +4460,7 @@
         <p:spPr>
           <a:xfrm>
             <a:off x="8072280" y="2585880"/>
-            <a:ext cx="2142360" cy="2142360"/>
+            <a:ext cx="2142000" cy="2142000"/>
           </a:xfrm>
           <a:prstGeom prst="rect">
             <a:avLst/>
@@ -4627,7 +4517,7 @@
         <p:spPr>
           <a:xfrm>
             <a:off x="-1371600" y="-1371600"/>
-            <a:ext cx="3656880" cy="3656880"/>
+            <a:ext cx="3656520" cy="3656520"/>
           </a:xfrm>
           <a:prstGeom prst="ellipse">
             <a:avLst/>
@@ -4672,7 +4562,7 @@
         <p:spPr>
           <a:xfrm>
             <a:off x="731520" y="2377440"/>
-            <a:ext cx="2742480" cy="1096560"/>
+            <a:ext cx="2742120" cy="1096200"/>
           </a:xfrm>
           <a:prstGeom prst="rect">
             <a:avLst/>
@@ -4733,7 +4623,7 @@
         <p:spPr>
           <a:xfrm>
             <a:off x="731520" y="3474720"/>
-            <a:ext cx="10697760" cy="913680"/>
+            <a:ext cx="10697400" cy="913320"/>
           </a:xfrm>
           <a:prstGeom prst="rect">
             <a:avLst/>
@@ -4794,7 +4684,7 @@
         <p:spPr>
           <a:xfrm>
             <a:off x="731520" y="4434840"/>
-            <a:ext cx="10697760" cy="547920"/>
+            <a:ext cx="10697400" cy="547560"/>
           </a:xfrm>
           <a:prstGeom prst="rect">
             <a:avLst/>
@@ -4865,7 +4755,7 @@
         <p:spPr>
           <a:xfrm>
             <a:off x="8820360" y="180360"/>
-            <a:ext cx="4319640" cy="1401480"/>
+            <a:ext cx="4319280" cy="1401120"/>
           </a:xfrm>
           <a:prstGeom prst="rect">
             <a:avLst/>
@@ -4926,7 +4816,7 @@
         <p:spPr>
           <a:xfrm>
             <a:off x="9692640" y="457200"/>
-            <a:ext cx="1919520" cy="612000"/>
+            <a:ext cx="1919160" cy="611640"/>
           </a:xfrm>
           <a:prstGeom prst="rect">
             <a:avLst/>
@@ -4946,7 +4836,7 @@
         <p:spPr>
           <a:xfrm>
             <a:off x="548640" y="411480"/>
-            <a:ext cx="10972080" cy="730800"/>
+            <a:ext cx="10971720" cy="730440"/>
           </a:xfrm>
           <a:prstGeom prst="rect">
             <a:avLst/>
@@ -5007,7 +4897,7 @@
         <p:spPr>
           <a:xfrm>
             <a:off x="548640" y="1463040"/>
-            <a:ext cx="5760000" cy="4388400"/>
+            <a:ext cx="5759640" cy="4388040"/>
           </a:xfrm>
           <a:prstGeom prst="rect">
             <a:avLst/>
@@ -5170,7 +5060,7 @@
         <p:spPr>
           <a:xfrm>
             <a:off x="6675120" y="1463040"/>
-            <a:ext cx="4937040" cy="4388400"/>
+            <a:ext cx="4936680" cy="4388040"/>
           </a:xfrm>
           <a:prstGeom prst="roundRect">
             <a:avLst>
@@ -5226,7 +5116,7 @@
         <p:spPr>
           <a:xfrm>
             <a:off x="8072280" y="2585880"/>
-            <a:ext cx="2142360" cy="2142360"/>
+            <a:ext cx="2142000" cy="2142000"/>
           </a:xfrm>
           <a:prstGeom prst="rect">
             <a:avLst/>
@@ -5283,7 +5173,7 @@
         <p:spPr>
           <a:xfrm>
             <a:off x="556920" y="1902240"/>
-            <a:ext cx="547920" cy="547920"/>
+            <a:ext cx="547560" cy="547560"/>
           </a:xfrm>
           <a:prstGeom prst="ellipse">
             <a:avLst/>
@@ -5326,7 +5216,7 @@
         <p:spPr>
           <a:xfrm>
             <a:off x="548640" y="457200"/>
-            <a:ext cx="10972080" cy="822240"/>
+            <a:ext cx="10971720" cy="821880"/>
           </a:xfrm>
           <a:prstGeom prst="rect">
             <a:avLst/>
@@ -5387,7 +5277,7 @@
         <p:spPr>
           <a:xfrm>
             <a:off x="548640" y="2926080"/>
-            <a:ext cx="547920" cy="547920"/>
+            <a:ext cx="547560" cy="547560"/>
           </a:xfrm>
           <a:prstGeom prst="ellipse">
             <a:avLst/>
@@ -5430,7 +5320,7 @@
         <p:spPr>
           <a:xfrm>
             <a:off x="548640" y="2914920"/>
-            <a:ext cx="547920" cy="547920"/>
+            <a:ext cx="547560" cy="547560"/>
           </a:xfrm>
           <a:prstGeom prst="rect">
             <a:avLst/>
@@ -5491,7 +5381,7 @@
         <p:spPr>
           <a:xfrm>
             <a:off x="1371600" y="2971800"/>
-            <a:ext cx="9600480" cy="456480"/>
+            <a:ext cx="9600120" cy="456120"/>
           </a:xfrm>
           <a:prstGeom prst="rect">
             <a:avLst/>
@@ -5552,7 +5442,7 @@
         <p:spPr>
           <a:xfrm>
             <a:off x="548640" y="5760720"/>
-            <a:ext cx="5485680" cy="639360"/>
+            <a:ext cx="5485320" cy="639000"/>
           </a:xfrm>
           <a:prstGeom prst="rect">
             <a:avLst/>
@@ -5613,7 +5503,7 @@
         <p:spPr>
           <a:xfrm>
             <a:off x="548640" y="6309360"/>
-            <a:ext cx="10057680" cy="365040"/>
+            <a:ext cx="10057320" cy="364680"/>
           </a:xfrm>
           <a:prstGeom prst="rect">
             <a:avLst/>
@@ -5643,7 +5533,7 @@
               </a:tabLst>
             </a:pPr>
             <a:r>
-              <a:rPr lang="en-US" sz="1200" b="0" u="none" strike="noStrike">
+              <a:rPr lang="en-US" sz="800" b="0" u="none" strike="noStrike">
                 <a:solidFill>
                   <a:srgbClr val="9AA7C7"/>
                 </a:solidFill>
@@ -5652,9 +5542,39 @@
                 <a:latin typeface="Calibri"/>
                 <a:ea typeface="Calibri"/>
               </a:rPr>
-              <a:t>Joytechai</a:t>
+              <a:t>Contenido bajo licencia Creative Commons BY 4.0 (CC BY 4.0) — libre uso y adaptación citando la autoría</a:t>
             </a:r>
-            <a:endParaRPr lang="es-ES" sz="1200" b="0" u="none" strike="noStrike">
+            <a:endParaRPr lang="es-ES" sz="800" b="0" u="none" strike="noStrike">
+              <a:solidFill>
+                <a:srgbClr val="FFFFFF"/>
+              </a:solidFill>
+              <a:effectLst/>
+              <a:uFillTx/>
+              <a:latin typeface="Arial"/>
+            </a:endParaRPr>
+          </a:p>
+          <a:p>
+            <a:pPr>
+              <a:lnSpc>
+                <a:spcPct val="100000"/>
+              </a:lnSpc>
+              <a:tabLst>
+                <a:tab pos="0" algn="l"/>
+              </a:tabLst>
+            </a:pPr>
+            <a:r>
+              <a:rPr lang="en-US" sz="800" b="0" u="none" strike="noStrike">
+                <a:solidFill>
+                  <a:srgbClr val="9AA7C7"/>
+                </a:solidFill>
+                <a:effectLst/>
+                <a:uFillTx/>
+                <a:latin typeface="Calibri"/>
+                <a:ea typeface="Calibri"/>
+              </a:rPr>
+              <a:t>Este documento se ha elaborado con el máximo cuidado, pero puede contener errores u omisiones; los autores no se hacen responsables del uso que se haga de su contenido.</a:t>
+            </a:r>
+            <a:endParaRPr lang="es-ES" sz="800" b="0" u="none" strike="noStrike">
               <a:solidFill>
                 <a:srgbClr val="FFFFFF"/>
               </a:solidFill>
@@ -5674,7 +5594,7 @@
         <p:spPr>
           <a:xfrm>
             <a:off x="556920" y="1902240"/>
-            <a:ext cx="547920" cy="547920"/>
+            <a:ext cx="547560" cy="547560"/>
           </a:xfrm>
           <a:prstGeom prst="rect">
             <a:avLst/>
@@ -5735,7 +5655,7 @@
         <p:spPr>
           <a:xfrm>
             <a:off x="1371600" y="1947960"/>
-            <a:ext cx="9600480" cy="456480"/>
+            <a:ext cx="9600120" cy="456120"/>
           </a:xfrm>
           <a:prstGeom prst="rect">
             <a:avLst/>
@@ -5796,7 +5716,7 @@
         <p:spPr>
           <a:xfrm>
             <a:off x="548640" y="3949920"/>
-            <a:ext cx="547920" cy="547920"/>
+            <a:ext cx="547560" cy="547560"/>
           </a:xfrm>
           <a:prstGeom prst="ellipse">
             <a:avLst/>
@@ -5839,7 +5759,7 @@
         <p:spPr>
           <a:xfrm>
             <a:off x="548640" y="3938760"/>
-            <a:ext cx="547920" cy="547920"/>
+            <a:ext cx="547560" cy="547560"/>
           </a:xfrm>
           <a:prstGeom prst="rect">
             <a:avLst/>
@@ -5900,7 +5820,7 @@
         <p:spPr>
           <a:xfrm>
             <a:off x="1371600" y="3995640"/>
-            <a:ext cx="9600480" cy="730800"/>
+            <a:ext cx="9600120" cy="730440"/>
           </a:xfrm>
           <a:prstGeom prst="rect">
             <a:avLst/>
@@ -5971,7 +5891,7 @@
         <p:spPr>
           <a:xfrm>
             <a:off x="8820360" y="180360"/>
-            <a:ext cx="4319640" cy="1401480"/>
+            <a:ext cx="4319280" cy="1401120"/>
           </a:xfrm>
           <a:prstGeom prst="rect">
             <a:avLst/>
@@ -6032,7 +5952,7 @@
         <p:spPr>
           <a:xfrm>
             <a:off x="9692640" y="502920"/>
-            <a:ext cx="1919520" cy="612000"/>
+            <a:ext cx="1919160" cy="611640"/>
           </a:xfrm>
           <a:prstGeom prst="rect">
             <a:avLst/>
@@ -6052,7 +5972,7 @@
         <p:spPr>
           <a:xfrm>
             <a:off x="548640" y="457200"/>
-            <a:ext cx="10972080" cy="822240"/>
+            <a:ext cx="10971720" cy="821880"/>
           </a:xfrm>
           <a:prstGeom prst="rect">
             <a:avLst/>
@@ -6113,7 +6033,7 @@
         <p:spPr>
           <a:xfrm>
             <a:off x="548640" y="1828800"/>
-            <a:ext cx="1962360" cy="2925360"/>
+            <a:ext cx="1962000" cy="2925000"/>
           </a:xfrm>
           <a:prstGeom prst="roundRect">
             <a:avLst>
@@ -6165,7 +6085,7 @@
         <p:spPr>
           <a:xfrm>
             <a:off x="777240" y="2103120"/>
-            <a:ext cx="639360" cy="639360"/>
+            <a:ext cx="639000" cy="639000"/>
           </a:xfrm>
           <a:prstGeom prst="ellipse">
             <a:avLst/>
@@ -6219,7 +6139,7 @@
         <p:spPr>
           <a:xfrm>
             <a:off x="914400" y="2240280"/>
-            <a:ext cx="365040" cy="365040"/>
+            <a:ext cx="364680" cy="364680"/>
           </a:xfrm>
           <a:prstGeom prst="rect">
             <a:avLst/>
@@ -6239,7 +6159,7 @@
         <p:spPr>
           <a:xfrm>
             <a:off x="1688760" y="2057400"/>
-            <a:ext cx="639360" cy="456480"/>
+            <a:ext cx="639000" cy="456120"/>
           </a:xfrm>
           <a:prstGeom prst="rect">
             <a:avLst/>
@@ -6300,7 +6220,7 @@
         <p:spPr>
           <a:xfrm>
             <a:off x="777240" y="2971800"/>
-            <a:ext cx="1505160" cy="456480"/>
+            <a:ext cx="1504800" cy="456120"/>
           </a:xfrm>
           <a:prstGeom prst="rect">
             <a:avLst/>
@@ -6361,7 +6281,7 @@
         <p:spPr>
           <a:xfrm>
             <a:off x="2831760" y="1828800"/>
-            <a:ext cx="1962360" cy="2925360"/>
+            <a:ext cx="1962000" cy="2925000"/>
           </a:xfrm>
           <a:prstGeom prst="roundRect">
             <a:avLst>
@@ -6413,7 +6333,7 @@
         <p:spPr>
           <a:xfrm>
             <a:off x="3060360" y="2103120"/>
-            <a:ext cx="639360" cy="639360"/>
+            <a:ext cx="639000" cy="639000"/>
           </a:xfrm>
           <a:prstGeom prst="ellipse">
             <a:avLst/>
@@ -6467,7 +6387,7 @@
         <p:spPr>
           <a:xfrm>
             <a:off x="3197520" y="2240280"/>
-            <a:ext cx="365040" cy="365040"/>
+            <a:ext cx="364680" cy="364680"/>
           </a:xfrm>
           <a:prstGeom prst="rect">
             <a:avLst/>
@@ -6487,7 +6407,7 @@
         <p:spPr>
           <a:xfrm>
             <a:off x="3971520" y="2057400"/>
-            <a:ext cx="639360" cy="456480"/>
+            <a:ext cx="639000" cy="456120"/>
           </a:xfrm>
           <a:prstGeom prst="rect">
             <a:avLst/>
@@ -6548,7 +6468,7 @@
         <p:spPr>
           <a:xfrm>
             <a:off x="3060360" y="2971800"/>
-            <a:ext cx="1505160" cy="456480"/>
+            <a:ext cx="1504800" cy="456120"/>
           </a:xfrm>
           <a:prstGeom prst="rect">
             <a:avLst/>
@@ -6609,7 +6529,7 @@
         <p:spPr>
           <a:xfrm>
             <a:off x="5114520" y="1828800"/>
-            <a:ext cx="1962360" cy="2925360"/>
+            <a:ext cx="1962000" cy="2925000"/>
           </a:xfrm>
           <a:prstGeom prst="roundRect">
             <a:avLst>
@@ -6661,7 +6581,7 @@
         <p:spPr>
           <a:xfrm>
             <a:off x="5343120" y="2103120"/>
-            <a:ext cx="639360" cy="639360"/>
+            <a:ext cx="639000" cy="639000"/>
           </a:xfrm>
           <a:prstGeom prst="ellipse">
             <a:avLst/>
@@ -6715,7 +6635,7 @@
         <p:spPr>
           <a:xfrm>
             <a:off x="5480280" y="2240280"/>
-            <a:ext cx="365040" cy="365040"/>
+            <a:ext cx="364680" cy="364680"/>
           </a:xfrm>
           <a:prstGeom prst="rect">
             <a:avLst/>
@@ -6735,7 +6655,7 @@
         <p:spPr>
           <a:xfrm>
             <a:off x="6254640" y="2057400"/>
-            <a:ext cx="639360" cy="456480"/>
+            <a:ext cx="639000" cy="456120"/>
           </a:xfrm>
           <a:prstGeom prst="rect">
             <a:avLst/>
@@ -6796,7 +6716,7 @@
         <p:spPr>
           <a:xfrm>
             <a:off x="5343120" y="2971800"/>
-            <a:ext cx="1505160" cy="456480"/>
+            <a:ext cx="1504800" cy="456120"/>
           </a:xfrm>
           <a:prstGeom prst="rect">
             <a:avLst/>
@@ -6857,7 +6777,7 @@
         <p:spPr>
           <a:xfrm>
             <a:off x="7397640" y="1828800"/>
-            <a:ext cx="1962360" cy="2925360"/>
+            <a:ext cx="1962000" cy="2925000"/>
           </a:xfrm>
           <a:prstGeom prst="roundRect">
             <a:avLst>
@@ -6909,7 +6829,7 @@
         <p:spPr>
           <a:xfrm>
             <a:off x="7626240" y="2103120"/>
-            <a:ext cx="639360" cy="639360"/>
+            <a:ext cx="639000" cy="639000"/>
           </a:xfrm>
           <a:prstGeom prst="ellipse">
             <a:avLst/>
@@ -6963,7 +6883,7 @@
         <p:spPr>
           <a:xfrm>
             <a:off x="7763400" y="2240280"/>
-            <a:ext cx="365040" cy="365040"/>
+            <a:ext cx="364680" cy="364680"/>
           </a:xfrm>
           <a:prstGeom prst="rect">
             <a:avLst/>
@@ -6983,7 +6903,7 @@
         <p:spPr>
           <a:xfrm>
             <a:off x="8537400" y="2057400"/>
-            <a:ext cx="639360" cy="456480"/>
+            <a:ext cx="639000" cy="456120"/>
           </a:xfrm>
           <a:prstGeom prst="rect">
             <a:avLst/>
@@ -7044,7 +6964,7 @@
         <p:spPr>
           <a:xfrm>
             <a:off x="7626240" y="2971800"/>
-            <a:ext cx="1505160" cy="456480"/>
+            <a:ext cx="1504800" cy="456120"/>
           </a:xfrm>
           <a:prstGeom prst="rect">
             <a:avLst/>
@@ -7105,7 +7025,7 @@
         <p:spPr>
           <a:xfrm>
             <a:off x="9680400" y="1828800"/>
-            <a:ext cx="1962360" cy="2925360"/>
+            <a:ext cx="1962000" cy="2925000"/>
           </a:xfrm>
           <a:prstGeom prst="roundRect">
             <a:avLst>
@@ -7157,7 +7077,7 @@
         <p:spPr>
           <a:xfrm>
             <a:off x="9909000" y="2103120"/>
-            <a:ext cx="639360" cy="639360"/>
+            <a:ext cx="639000" cy="639000"/>
           </a:xfrm>
           <a:prstGeom prst="ellipse">
             <a:avLst/>
@@ -7211,7 +7131,7 @@
         <p:spPr>
           <a:xfrm>
             <a:off x="10046160" y="2240280"/>
-            <a:ext cx="365040" cy="365040"/>
+            <a:ext cx="364680" cy="364680"/>
           </a:xfrm>
           <a:prstGeom prst="rect">
             <a:avLst/>
@@ -7231,7 +7151,7 @@
         <p:spPr>
           <a:xfrm>
             <a:off x="10820520" y="2057400"/>
-            <a:ext cx="639360" cy="456480"/>
+            <a:ext cx="639000" cy="456120"/>
           </a:xfrm>
           <a:prstGeom prst="rect">
             <a:avLst/>
@@ -7292,7 +7212,7 @@
         <p:spPr>
           <a:xfrm>
             <a:off x="9909000" y="2971800"/>
-            <a:ext cx="1505160" cy="456480"/>
+            <a:ext cx="1504800" cy="456120"/>
           </a:xfrm>
           <a:prstGeom prst="rect">
             <a:avLst/>
@@ -7390,7 +7310,7 @@
         <p:spPr>
           <a:xfrm>
             <a:off x="-1371600" y="-1371600"/>
-            <a:ext cx="3656880" cy="3656880"/>
+            <a:ext cx="3656520" cy="3656520"/>
           </a:xfrm>
           <a:prstGeom prst="ellipse">
             <a:avLst/>
@@ -7435,7 +7355,7 @@
         <p:spPr>
           <a:xfrm>
             <a:off x="731520" y="2377440"/>
-            <a:ext cx="2742480" cy="1096560"/>
+            <a:ext cx="2742120" cy="1096200"/>
           </a:xfrm>
           <a:prstGeom prst="rect">
             <a:avLst/>
@@ -7496,7 +7416,7 @@
         <p:spPr>
           <a:xfrm>
             <a:off x="731520" y="3474720"/>
-            <a:ext cx="10697760" cy="913680"/>
+            <a:ext cx="10697400" cy="913320"/>
           </a:xfrm>
           <a:prstGeom prst="rect">
             <a:avLst/>
@@ -7557,7 +7477,7 @@
         <p:spPr>
           <a:xfrm>
             <a:off x="731520" y="4434840"/>
-            <a:ext cx="10697760" cy="547920"/>
+            <a:ext cx="10697400" cy="547560"/>
           </a:xfrm>
           <a:prstGeom prst="rect">
             <a:avLst/>
@@ -7628,7 +7548,7 @@
         <p:spPr>
           <a:xfrm>
             <a:off x="8820000" y="180000"/>
-            <a:ext cx="4319640" cy="1401480"/>
+            <a:ext cx="4319280" cy="1401120"/>
           </a:xfrm>
           <a:prstGeom prst="rect">
             <a:avLst/>
@@ -7689,7 +7609,7 @@
         <p:spPr>
           <a:xfrm>
             <a:off x="9692640" y="457200"/>
-            <a:ext cx="1919520" cy="612000"/>
+            <a:ext cx="1919160" cy="611640"/>
           </a:xfrm>
           <a:prstGeom prst="rect">
             <a:avLst/>
@@ -7709,7 +7629,7 @@
         <p:spPr>
           <a:xfrm>
             <a:off x="548640" y="411480"/>
-            <a:ext cx="10972080" cy="730800"/>
+            <a:ext cx="10971720" cy="730440"/>
           </a:xfrm>
           <a:prstGeom prst="rect">
             <a:avLst/>
@@ -7770,7 +7690,7 @@
         <p:spPr>
           <a:xfrm>
             <a:off x="548640" y="1463040"/>
-            <a:ext cx="5760000" cy="4388400"/>
+            <a:ext cx="5759640" cy="4388040"/>
           </a:xfrm>
           <a:prstGeom prst="rect">
             <a:avLst/>
@@ -7933,7 +7853,7 @@
         <p:spPr>
           <a:xfrm>
             <a:off x="6675120" y="1463040"/>
-            <a:ext cx="4937040" cy="4388400"/>
+            <a:ext cx="4936680" cy="4388040"/>
           </a:xfrm>
           <a:prstGeom prst="roundRect">
             <a:avLst>
@@ -7989,7 +7909,7 @@
         <p:spPr>
           <a:xfrm>
             <a:off x="7942320" y="2455920"/>
-            <a:ext cx="2403000" cy="2403000"/>
+            <a:ext cx="2402640" cy="2402640"/>
           </a:xfrm>
           <a:prstGeom prst="rect">
             <a:avLst/>
@@ -8046,7 +7966,7 @@
         <p:spPr>
           <a:xfrm>
             <a:off x="-1371600" y="-1371600"/>
-            <a:ext cx="3656880" cy="3656880"/>
+            <a:ext cx="3656520" cy="3656520"/>
           </a:xfrm>
           <a:prstGeom prst="ellipse">
             <a:avLst/>
@@ -8091,7 +8011,7 @@
         <p:spPr>
           <a:xfrm>
             <a:off x="731520" y="2377440"/>
-            <a:ext cx="2742480" cy="1096560"/>
+            <a:ext cx="2742120" cy="1096200"/>
           </a:xfrm>
           <a:prstGeom prst="rect">
             <a:avLst/>
@@ -8152,7 +8072,7 @@
         <p:spPr>
           <a:xfrm>
             <a:off x="731520" y="3474720"/>
-            <a:ext cx="10697760" cy="913680"/>
+            <a:ext cx="10697400" cy="913320"/>
           </a:xfrm>
           <a:prstGeom prst="rect">
             <a:avLst/>
@@ -8213,7 +8133,7 @@
         <p:spPr>
           <a:xfrm>
             <a:off x="731520" y="4434840"/>
-            <a:ext cx="10697760" cy="547920"/>
+            <a:ext cx="10697400" cy="547560"/>
           </a:xfrm>
           <a:prstGeom prst="rect">
             <a:avLst/>
@@ -8284,7 +8204,7 @@
         <p:spPr>
           <a:xfrm>
             <a:off x="8820360" y="180360"/>
-            <a:ext cx="4319640" cy="1401480"/>
+            <a:ext cx="4319280" cy="1401120"/>
           </a:xfrm>
           <a:prstGeom prst="rect">
             <a:avLst/>
@@ -8345,7 +8265,7 @@
         <p:spPr>
           <a:xfrm>
             <a:off x="9692640" y="457200"/>
-            <a:ext cx="1919520" cy="612000"/>
+            <a:ext cx="1919160" cy="611640"/>
           </a:xfrm>
           <a:prstGeom prst="rect">
             <a:avLst/>
@@ -8365,7 +8285,7 @@
         <p:spPr>
           <a:xfrm>
             <a:off x="548640" y="411480"/>
-            <a:ext cx="10972080" cy="730800"/>
+            <a:ext cx="10971720" cy="730440"/>
           </a:xfrm>
           <a:prstGeom prst="rect">
             <a:avLst/>
@@ -8426,7 +8346,7 @@
         <p:spPr>
           <a:xfrm>
             <a:off x="548640" y="1463040"/>
-            <a:ext cx="5760000" cy="4388400"/>
+            <a:ext cx="5759640" cy="4388040"/>
           </a:xfrm>
           <a:prstGeom prst="rect">
             <a:avLst/>
@@ -8589,7 +8509,7 @@
         <p:spPr>
           <a:xfrm>
             <a:off x="6675120" y="1463040"/>
-            <a:ext cx="4937040" cy="4388400"/>
+            <a:ext cx="4936680" cy="4388040"/>
           </a:xfrm>
           <a:prstGeom prst="roundRect">
             <a:avLst>
@@ -8645,7 +8565,7 @@
         <p:spPr>
           <a:xfrm>
             <a:off x="7940880" y="2454480"/>
-            <a:ext cx="2405160" cy="2405160"/>
+            <a:ext cx="2404800" cy="2404800"/>
           </a:xfrm>
           <a:prstGeom prst="rect">
             <a:avLst/>
@@ -8702,7 +8622,7 @@
         <p:spPr>
           <a:xfrm>
             <a:off x="-1371600" y="-1371600"/>
-            <a:ext cx="3656880" cy="3656880"/>
+            <a:ext cx="3656520" cy="3656520"/>
           </a:xfrm>
           <a:prstGeom prst="ellipse">
             <a:avLst/>
@@ -8747,7 +8667,7 @@
         <p:spPr>
           <a:xfrm>
             <a:off x="731520" y="2377440"/>
-            <a:ext cx="2742480" cy="1096560"/>
+            <a:ext cx="2742120" cy="1096200"/>
           </a:xfrm>
           <a:prstGeom prst="rect">
             <a:avLst/>
@@ -8808,7 +8728,7 @@
         <p:spPr>
           <a:xfrm>
             <a:off x="731520" y="3474720"/>
-            <a:ext cx="10697760" cy="913680"/>
+            <a:ext cx="10697400" cy="913320"/>
           </a:xfrm>
           <a:prstGeom prst="rect">
             <a:avLst/>
@@ -8869,7 +8789,7 @@
         <p:spPr>
           <a:xfrm>
             <a:off x="731520" y="4434840"/>
-            <a:ext cx="10697760" cy="547920"/>
+            <a:ext cx="10697400" cy="547560"/>
           </a:xfrm>
           <a:prstGeom prst="rect">
             <a:avLst/>
@@ -8940,7 +8860,7 @@
         <p:spPr>
           <a:xfrm>
             <a:off x="8820360" y="180360"/>
-            <a:ext cx="4319640" cy="1401480"/>
+            <a:ext cx="4319280" cy="1401120"/>
           </a:xfrm>
           <a:prstGeom prst="rect">
             <a:avLst/>
@@ -9001,7 +8921,7 @@
         <p:spPr>
           <a:xfrm>
             <a:off x="9692640" y="457200"/>
-            <a:ext cx="1919520" cy="612000"/>
+            <a:ext cx="1919160" cy="611640"/>
           </a:xfrm>
           <a:prstGeom prst="rect">
             <a:avLst/>
@@ -9021,7 +8941,7 @@
         <p:spPr>
           <a:xfrm>
             <a:off x="548640" y="411480"/>
-            <a:ext cx="10972080" cy="730800"/>
+            <a:ext cx="10971720" cy="730440"/>
           </a:xfrm>
           <a:prstGeom prst="rect">
             <a:avLst/>
@@ -9082,7 +9002,7 @@
         <p:spPr>
           <a:xfrm>
             <a:off x="548640" y="1463040"/>
-            <a:ext cx="5760000" cy="4388400"/>
+            <a:ext cx="5759640" cy="4388040"/>
           </a:xfrm>
           <a:prstGeom prst="rect">
             <a:avLst/>
@@ -9278,7 +9198,7 @@
         <p:spPr>
           <a:xfrm>
             <a:off x="6675120" y="1463040"/>
-            <a:ext cx="4937040" cy="4388400"/>
+            <a:ext cx="4936680" cy="4388040"/>
           </a:xfrm>
           <a:prstGeom prst="roundRect">
             <a:avLst>
@@ -9334,7 +9254,7 @@
         <p:spPr>
           <a:xfrm>
             <a:off x="7947720" y="2461320"/>
-            <a:ext cx="2391840" cy="2391840"/>
+            <a:ext cx="2391480" cy="2391480"/>
           </a:xfrm>
           <a:prstGeom prst="rect">
             <a:avLst/>
@@ -9391,7 +9311,7 @@
         <p:spPr>
           <a:xfrm>
             <a:off x="-1371600" y="-1371600"/>
-            <a:ext cx="3656880" cy="3656880"/>
+            <a:ext cx="3656520" cy="3656520"/>
           </a:xfrm>
           <a:prstGeom prst="ellipse">
             <a:avLst/>
@@ -9436,7 +9356,7 @@
         <p:spPr>
           <a:xfrm>
             <a:off x="731520" y="2377440"/>
-            <a:ext cx="2742480" cy="1096560"/>
+            <a:ext cx="2742120" cy="1096200"/>
           </a:xfrm>
           <a:prstGeom prst="rect">
             <a:avLst/>
@@ -9497,7 +9417,7 @@
         <p:spPr>
           <a:xfrm>
             <a:off x="731520" y="3474720"/>
-            <a:ext cx="10697760" cy="913680"/>
+            <a:ext cx="10697400" cy="913320"/>
           </a:xfrm>
           <a:prstGeom prst="rect">
             <a:avLst/>
@@ -9558,7 +9478,7 @@
         <p:spPr>
           <a:xfrm>
             <a:off x="731520" y="4434840"/>
-            <a:ext cx="10697760" cy="547920"/>
+            <a:ext cx="10697400" cy="547560"/>
           </a:xfrm>
           <a:prstGeom prst="rect">
             <a:avLst/>
@@ -9629,7 +9549,7 @@
         <p:spPr>
           <a:xfrm>
             <a:off x="8820360" y="180360"/>
-            <a:ext cx="4319640" cy="1401480"/>
+            <a:ext cx="4319280" cy="1401120"/>
           </a:xfrm>
           <a:prstGeom prst="rect">
             <a:avLst/>
